--- a/IT002-OOP/Slide lý thuyết/Poly.pptx
+++ b/IT002-OOP/Slide lý thuyết/Poly.pptx
@@ -232,40 +232,6 @@
           <inkml:channelProperty channel="F" name="resolution" value="0" units="1/dev"/>
         </inkml:channelProperties>
       </inkml:inkSource>
-      <inkml:timestamp xml:id="ts0" timeString="2025-10-21T01:01:17.131"/>
-    </inkml:context>
-    <inkml:brush xml:id="br0">
-      <inkml:brushProperty name="width" value="0.05292" units="cm"/>
-      <inkml:brushProperty name="height" value="0.05292" units="cm"/>
-      <inkml:brushProperty name="color" value="#00B050"/>
-    </inkml:brush>
-  </inkml:definitions>
-  <inkml:trace contextRef="#ctx0" brushRef="#br0">14367 12780 24575,'-65'0'0,"22"-5"0,-5-2 0,-22-5 0,-4-3-434,24 3 0,-1-3 0,-1 1 434,-7 1 0,-3-1 0,1 0 0,0-3 0,1 0 0,-1 1 0,-2 5 0,0 2 0,0 0 0,1 0 0,-1 1 0,0-2 0,2-2 0,1-1 0,-1 3 0,0 7 0,0 2 0,1-1 0,5-5 0,1-3 0,-2 4 0,-8 4 0,-2 3 0,2 0 0,9-1 0,2 0 0,-1 0 0,-3 0 0,0 1 0,1-2 0,-18-5 0,1 0 0,21 5 0,-1 0 0,2 0 0,-16-5 0,-1 0 0,16 5 0,0 2 0,0-1 0,-16 0 0,1 0 187,-6 0 0,2 0-187,10 0 0,1 0 0,-5 0 0,1 0 114,15 0 0,1 0-114,-4 0 0,1 0 0,10 0 0,3 0 0,-30 0 330,29 0 0,2 0-330,-19 0 40,3 0-40,3 12 0,20-9 0,-20 32 0,9-17 0,0 32 0,15-33 0,-10 19 0,31-10 0,-31 15 0,33 24 0,-8 3 0,-2-30 0,2 3 0,8 10 0,0 1 0,-9-4 0,1 1 0,7 14 0,8 3 0,7 0 0,1 1 0,-10 0 0,2 1 0,12 4 0,3 0 0,-5-11 0,-1-2 0,0 1 0,3-2 0,8-9 0,2-4 0,-5-10 0,-1-2 0,21 28 0,-14-31 0,8-4 0,-17-14 0,44 12 0,5-19 0,-21 6 0,2 2 0,10 0 0,2-3 0,0-7 0,0 0 0,0 9 0,1 0 0,-11-10 0,3-3 0,-3 0 0,7 1 0,0 0 0,-7 0 0,3 0 0,-3 0 0,12 0 0,-3 0 0,-4 0 0,-1 0 0,-2 0 0,-1 0 0,-11 0 0,-1 0 0,1 1 0,-1-2 0,1-11 0,0 0 0,27 6 0,-29-17 0,1-1 0,28 19 0,-33-12 0,0-2 0,4 5 0,0 2 0,30-6 0,-28-1 0,-1 3 0,29 13 0,-30-14 0,0-1 0,30 12 0,-34-12 0,0 0 0,3 17 0,2 0 0,6-15 0,1-4 0,-4 5 0,1 1 0,8-1 0,1 0 0,2-2 0,-5-1 0,13-8 0,-13 17 0,-1 0 0,8-14 0,-11 15 0,1 4 0,13 1 0,14-9 0,-20-11 0,-9 17 0,-7-7 0,0 2 0,7 11 0,-7 1 0,2-2 0,29-11 0,-28 11 0,-1 0 0,29-11 0,-29 0 0,-2 0 0,19 6 0,-3-17 0,-3 11 0,-21 9 0,21-9 0,-32 12 0,29-23 0,-41 17 0,18-41 0,-24 41 0,0-29 0,0 32 0,0-32 0,0 17 0,11-32 0,-8 21 0,9 2 0,-12-8 0,0 29 0,0-41 0,0 41 0,0-29 0,0 32 0,0-9 0,-12 12 0,9-23 0,-8 17 0,-13-18 0,18 24 0,-17 0 0</inkml:trace>
-  <inkml:trace contextRef="#ctx0" brushRef="#br0" timeOffset="20106">27649 6509 24575,'-44'-6'0,"0"0"0,8-11 0,-2-4 0,-29 0 0,-4-2 0,10-8 0,-1-3-477,7 11 1,-3 1 0,0 3 476,4 3 0,0 3 0,0-2 0,-3-6 0,0-2 0,1 5 0,-18 8 0,1 2 0,21-3 0,-1-1 0,2 0 151,-17-1 0,1-1-151,1-5 0,0-3 0,15 8 0,0 0 0,0 1 0,-18 0 0,0 0 0,16 0 0,0 0 0,0 3 0,0 7 0,1 3 0,1-2 0,-17-10 0,1 0 0,0 5 0,1 2 0,1 4 0,1-1 0,4-4 0,0 1 0,-7 4 0,1 2 137,6-1 1,0 0-138,-5 0 0,0 0 0,5 0 0,0 0 0,-1 0 0,1 0 0,7 0 0,1 0 361,-7 0 1,3 0-362,13 0 0,1 0 64,-10 0 1,1 0-65,5 0 0,1 0 0,3 0 0,1 0 0,-4 0 0,-1 0 0,6-1 0,1 2 0,-1 4 0,0 1 0,1-6 0,-1 3 0,1 15 0,-1 0 0,-6-15 0,0-1 0,5 16 0,0 0 0,-6-17 0,3 1 0,-12 33 0,12-33 0,3 2 0,6 43 0,-1-38 0,-2-1 0,-15 42 0,9-20 0,13-7 0,0 4 0,-10 26 0,0 3 0,15-19 0,2 2 0,-5 29 0,4-18 0,0 3 0,10-11 0,0 1 0,-10 8 0,0 1 0,17-11 0,-1-3 0,-16-3 0,3-2 0,16 20 0,-18-3 0,24-21 0,0 21 0,0-21 0,0 21 0,0 3 0,0 15 0,0-1 0,0-27 0,0-3 0,0 7 0,-2-1 0,4-1 0,22-6 0,-18 37 0,41-44 0,-30 21 0,10-20 0,8 20 0,6-33 0,3 30 0,18-29 0,-9 9 0,3 8 0,-3-29 0,-3 29 0,-21-32 0,21 32 0,-9-29 0,0 29 0,9-32 0,-20 33 0,32-7 0,-18 0 0,20 7 0,-23-10 0,9-8 0,-20 17 0,20-32 0,-21 32 0,21-29 0,3 18 0,3-24 0,-17-1 0,-2 2 0,8 10 0,-4-9 0,3-1 0,15 11 0,-15-11 0,3-2 0,-7 1 0,-1 0 0,1 0 0,-1 0 0,1 0 0,0 0 0,0 0 0,-1 0 0,1 0 0,0 0 0,5 0 0,1 0 0,1 0 0,0 0 0,0 0 0,0 0 0,6 0 0,-3 0 0,9 0 0,-17 0 0,1 0 0,13 0 0,-12 0 0,3 0 0,-5 1 0,-2-2 0,28-11 0,5 9 0,-5-8 0,-28-2 0,2 2 0,4 9 0,-1-2 0,-5-14 0,0 1 0,-1 15 0,1 1 0,0-16 0,-1-1 0,1 9 0,0 0 0,5-16 0,1 0 0,-5 16 0,0 0 0,6-14 0,-3-1 0,12 7 0,-13-8 0,-1 0 0,17 7 0,-25 1 0,0-1 0,28-9 0,-33 10 0,-3-7 0,10 13 0,-19 8 0,10-9 0,8-12 0,-29 18 0,41-41 0,-41 42 0,29-31 0,-32 10 0,32 8 0,-29-17 0,30 8 0,-10 10 0,-8-19 0,17 34 0,-32-34 0,32 7 0,-29-1 0,18-5 0,-24 9 0,23 8 0,-17-17 0,18 8 0,-24 10 0,0-19 0,11 34 0,-8-34 0,9 30 0,-12-29 0,0 32 0,0-32 0,0 29 0,0-18 0,0 1 0,23 17 0,-17-17 0,18 11 0,-24 9 0,0-32 0,0 29 0,0-18 0,0 12 0,0 9 0,0-8 0,0 11 0,0-24 0,0 18 0,0-17 0,0 23 0,0 0 0,0-12 0,0 9 0,0-9 0,12 12 0,-9-23 0,8 17 0,-11-41 0,0 41 0,24-29 0,-18 32 0,17-32 0,-23 17 0,0-9 0,0-8 0,0 18 0,12-33 0,-9 32 0,9-29 0,-12 41 0,0-29 0,0 32 0,0-33 0,0 31 0,0-19 0,0 24 0,0 0 0</inkml:trace>
-  <inkml:trace contextRef="#ctx0" brushRef="#br0" timeOffset="27434">27384 9340 24575,'-14'0'0,"-22"-23"0,19 5 0,-33-8 0,9-10 0,-1 30 0,-8-29 0,21 32 0,-33-9 0,-5-11 0,26 20 0,-1 0 0,-3-15 0,-1 1 0,6 15 0,1 1 0,-1-17 0,1 0 0,-1 16 0,0-1 0,0-21 0,1 1 0,0 19 0,-2 2 0,-5-16 0,1 0 0,-14 15 0,17-1 0,-1-3 0,-13-17 0,11 22 0,-1-2 0,-13-31 0,17 34 0,-1-1 0,-13-33 0,-11 17 0,28 5 0,1 0 0,-18 1 0,4-12 0,-10-5 0,18 0 0,-21-7 0,24 33 0,-21-32 0,18 18 0,-9-10 0,3-8 0,9 29 0,0-29 0,-9 32 0,20-9 0,4 12 0,-9 0 0,-6 0 0,-27 0 0,17 0 0,-1 0 0,9 0 0,1 0 0,-9 0 0,-1 0 0,0 0 0,1 0 0,8 0 0,1 0 0,-9 0 0,-1 0 0,0 0 0,1 0 0,9 0 0,-1 0 0,-21 0 0,1 0 0,20 0 0,1 0 0,-10 0 0,1 0 0,10 0 0,3 0 0,-30 0 0,29 0 0,2 0 0,-7 0 0,-18 0 0,32 0 0,-20 12 0,9-9 0,0 8 0,-9 13 0,21-18 0,-21 29 0,20-32 0,-20 32 0,9-17 0,12 8 0,-6 10 0,8-30 0,-2 41 0,-21-30 0,20 33 0,-20-20 0,9 20 0,0-21 0,15 21 0,-10-9 0,19 24 0,-10-21 0,9-8 0,1 1 0,-1 7 0,6-6 0,-2 1 0,-4-5 0,1 0 0,1 5 0,2 1 0,0-1 0,-1 1 0,-5 6 0,5-1 0,13-3 0,1-1 0,-17 4 0,0 1 0,15-7 0,0 1 0,-9 11 0,1 1 0,10-9 0,2-1 0,-1 10 0,0-1 0,0-10 0,0-2 0,0 28 0,0-14 0,23-3 0,-17-20 0,30 20 0,-33-33 0,32 30 0,-29-29 0,41 8 0,-30 10 0,33-19 0,-32 10 0,41 8 0,-39-29 0,42 29 0,-21-8 0,0-10 0,9 30 0,-20-29 0,20 8 0,3 10 0,3-31 0,-4 19 0,-2-12 0,-20-9 0,20 8 0,-21-11 0,21 0 0,-9 24 0,0-18 0,-14 17 0,8-23 0,-17 0 0,32 0 0,-21 0 0,21 12 0,-32-9 0,29 9 0,-29-12 0,32 0 0,-21 0 0,-3 0 0,10 0 0,5 0 0,15 0 0,-3 0 0,-3 0 0,-21 0 0,33 0 0,-18 0 0,20 0 0,-22 0 0,8 0 0,-21 0 0,21 0 0,-21 0 0,21 0 0,3 23 0,3-17 0,-3 18 0,-3-24 0,3 0 0,-9 0 0,-2 0 0,1 0 0,16 0 0,-13 0 0,-1 0 0,11 0 0,-13 0 0,-1 0 0,17 0 0,9 0 0,-31-12 0,-1 0 0,8 6 0,21-17 0,-24 23 0,9 0 0,-20 0 0,20 0 0,-21-12 0,21 9 0,-9-9 0,0 12 0,9 0 0,-20-23 0,20 17 0,-21-18 0,21 13 0,3 8 0,3-9 0,-3-12 0,-3 19 0,-21-19 0,21 12 0,-9 9 0,0-32 0,9 29 0,-20-41 0,20 41 0,-21-17 0,-3 11 0,10 9 0,-30-32 0,29 29 0,-9-29 0,-8 32 0,29-33 0,-29 19 0,32-33 0,-21 9 0,21 0 0,-32-9 0,17 20 0,-9-20 0,-8 21 0,29-21 0,-41 32 0,29-29 0,-8 29 0,-10-32 0,19 33 0,-33-18 0,8 32 0,-11-33 0,24 30 0,-18-17 0,17 23 0,-23 0 0,0 0 0</inkml:trace>
-  <inkml:trace contextRef="#ctx0" brushRef="#br0" timeOffset="34767">26564 11113 24575,'0'0'0</inkml:trace>
-  <inkml:trace contextRef="#ctx0" brushRef="#br0" timeOffset="82151">21405 6059 24575,'-38'0'0,"8"-23"0,-32 5 0,24-6 0,-3-2 0,-1 11 0,-1 1 0,-8-11 0,-1 0 0,6 10 0,1 0 0,4-10 0,-1 0 0,-3 16 0,-1 1 0,7-16 0,-1 1 0,-11 14 0,-1 0 0,10-15 0,-1-2 0,-20 11 0,-1 1 0,21-11 0,1 0 0,-14 10 0,-3 0 0,6-9 0,1-2 0,4 5 0,-1 1 0,-14 0 0,-1-1 0,10-5 0,-1 2 0,-15 8 0,-4 3 0,6 0 0,1-1 0,1-5 0,0 3 0,1 12 0,1 2 0,3-10 0,1 1 0,0 9 0,-1 4 0,2-2 0,1 0 0,4 0 0,2 0 0,5 0 0,0 0 0,-11 0 0,1 0 0,14 0 0,1 0 0,-9 0 0,-1 0 0,6 0 0,1 0 0,4 0 0,0 0 0,-6 0 0,3 0 0,-12 0 0,-18 0 0,7 23 0,8-17 0,15 6 0,3-1 0,-4-11 0,8 0 0,-2 0 0,-17 12 0,17-12 0,2 3 0,-7 32 0,-30-29 0,30 30 0,7-22 0,-2-2 0,-17 6 0,3 29 0,3-30 0,20 33 0,4-20 0,-9 20 0,5-21 0,-11 21 0,15-9 0,-10 0 0,19 21 0,-10-18 0,-8 9 0,29-3 0,-29-9 0,8 24 0,10-21 0,-7 18 0,1-33 0,17 45 0,-18-39 0,22 6 0,4 3 0,-2 12 0,0-11 0,0 1 0,0-5 0,0 1 0,0 9 0,0 0 0,0 20 0,-2-15 0,4 0 0,10-19 0,0-1 0,-11 16 0,4-1 0,18-10 0,1-3 0,-16 2 0,1 0 0,16 0 0,0-1 0,-10 1 0,0 0 0,10-7 0,0 1 0,-11 5 0,1-1 0,35 17 0,-9-2 0,-9-21 0,1-2 0,11 14 0,-12-12 0,-2 1 0,-1 8 0,21 9 0,-9-21 0,-9-3 0,1-2 0,11-6 0,4-1 0,1 1 0,13 9 0,0-7 0,2 1 0,-21-1 0,0 1 0,19 5 0,2-2 0,-16-9 0,1-1 0,15 12 0,1-2 0,-4-8 0,-1-2 0,-6-1 0,1 0 0,9 6 0,-2-2 0,-19-14 0,-1-1 0,9 11 0,1-2 0,1-10 0,-3-2 0,12 1 0,-13 0 0,-1 0 0,8 0 0,-12 0 0,3 0 0,-6 0 0,0 0 0,5 0 0,-1 0 0,-5 0 0,0 0 0,-1 0 0,1 0 0,10 0 0,3 0 0,0 2 0,3-4 0,15-13 0,2-5 0,-6 0 0,1-4-282,-16 0 0,0-2 1,0-4 281,-3-3 0,-1-3 0,2 2 0,2 6 0,2 2 0,-1-5 0,-10-3 0,-1-4 0,1-2 0,-1 2 0,12-2 0,0 1 0,0-8 0,-14-1 0,1-7 0,-1-4 0,-2 4 0,-3 7 0,14-9 0,-4 2 0,-14 1 0,1-1 0,-1 0 0</inkml:trace>
-  <inkml:trace contextRef="#ctx0" brushRef="#br0" timeOffset="85172">21246 11589 24575,'-38'0'0,"-15"-23"0,10 14 0,-5 0 0,-11-15 0,-3-2 0,15 12 0,-2 1 0,-2-1-410,-8-8 1,-2-1-1,-1 3 410,0 8 0,0 4 0,-2-4 0,9-4 0,-1-4 0,0 0 0,-1 5 0,-14 6 0,-1 4 0,1-1 0,0-6 0,0-1 0,1-1 0,4 2 0,0 0 0,1 1 0,3 1 0,0 0 0,1 1 0,2-1 0,2 0 0,0 0-10,3 1 0,1 1 0,1 2 10,-1 4 0,1 3 0,1 0 0,-17-1 0,1 0 0,15-4 0,-1 0 0,2 0 0,-17 3 0,1-1 0,0-4 0,1 0 0,7 6 0,1 0 0,4 0 0,2 0 0,4 0 0,2 0 456,0 0 0,1 0-456,-1 0 0,1 0 173,3 0 1,1 0-174,-5 0 0,1 0 0,-11 0 0,12 6 0,3 0 0,6-3 0,-8 12 0,1 5 0,-3 10 0,-7 11 0,2 9 0,8-21 0,1 21 0,-9-20 0,35 5 0,1 3 0,-11-8 0,0-1 0,-5 39 0,7-30 0,-4-3 0,-14 9 0,26-7 0,1 3 0,-4-7 0,1 1 0,2 5 0,3 2 0,4-2 0,-1 1 0,-10 5 0,2 1 0,16-5 0,-1 0 0,-15 5 0,-1 0 0,15-7 0,0 1 0,-9-1 0,1 1 0,9 11 0,4 1 0,-2-9 0,0-1 0,-2 10 0,4-1 0,9-10 0,1-2 0,-9 0 0,0 1 0,13 6 0,3-1 0,-5-4 0,-1 1 0,0 3 0,3 1 0,8 6 0,2-1 0,0-9 0,1 1 0,6 9 0,2-1 0,-2-11 0,1-1 0,4 1 0,1-1 0,-6-4 0,1-2 0,16 7 0,3-3 0,-11-15 0,2 0 0,18 10 0,2-3 0,-16-13 0,1-2 0,14 10 0,3 2 0,0-5 0,1-1 0,0 1 0,1-1 0,4-6 0,0-2 0,0 7 0,0-2 0,-5-14 0,1 0 0,-16 5 0,0 2 0,0-5 0,16-15 0,-1-3 0,0 12 0,-2-4 0,1-23 0,-2-3 0,-3 15 0,-2 0 0,-4-10 0,-1-1 0,10 2 0,-1 0 0,-14-1 0,-1-1 0,10-7 0,1 0 0,-5 7 0,-2-2 0,-4-14 0,-2 1 0,-6 24 0,-1 1 0,1-18 0,-3-4 0,-9 13 0,0-1 0,11-5 0,-2-3 0,-15 1 0,0 0 0,15-4 0,0 0 0,-14 5 0,-2-2 0,10-16 0,3-1 0,-2 10 0,0-1 0,3-13 0,-2-3 0,-6 6 0,2 0 0,13-6 0,1-2 0,-13-5 0,-1 0 0,4 11 0,1 1 0,-1-5 0,-4 3 0,-14 20 0,-1 2 0,10-11 0,2 1 0,16-11 0,-13 2 0,6 3 0,-32 20 0,9 4 0,-12 14 0</inkml:trace>
-  <inkml:trace contextRef="#ctx0" brushRef="#br0" timeOffset="107973">20426 13944 24575,'-41'0'0,"-9"-24"0,9 18 0,-24-29 0,21 32 0,-30-8 0,30 11 0,7-12 0,-2 0 0,-17 6 0,3-17 0,3 23 0,21 0 0,-21 0 0,20 0 0,-20 0 0,9 0 0,12 0 0,-7 0 0,10 0 0,8 0 0,-17 0 0,32 0 0,-32 0 0,29 0 0,-18 0 0,13 0 0,8 0 0,-9 0 0,12 0 0,-24 0 0,19 0 0,-42 0 0,41 0 0,-18 0 0,12 0 0,9 0 0,-8 23 0,11-17 0,0 18 0,-24-24 0,18 11 0,-17-8 0,23 9 0,-12 11 0,9-17 0,-9 18 0,12-24 0,-23 23 0,17-17 0,-18 18 0,24-12 0,0-10 0,0 10 0,0 12 0,-11-18 0,8 29 0,-9-32 0,12 9 0,0 11 0,0-17 0,0 29 0,0-32 0,-24 33 0,19-31 0,-19 42 0,24-41 0,0 30 0,0-33 0,0 32 0,0-29 0,0 29 0,0-32 0,0 32 0,0-17 0,0 8 0,0 10 0,0-31 0,0 42 0,0-41 0,0 30 0,24-33 0,-19 32 0,19-29 0,-12 29 0,-9-32 0,32 32 0,-29-29 0,29 18 0,-32-13 0,9-8 0,11 9 0,-17 12 0,29-19 0,-32 19 0,33 0 0,-30-19 0,41 19 0,-42-12 0,31-9 0,-10 8 0,-8-11 0,17 0 0,-8 0 0,2 24 0,21-18 0,-9 17 0,-12-23 0,7 0 0,-10 0 0,4 0 0,20 0 0,-21 0 0,21 0 0,-9 0 0,0 0 0,9 0 0,-32 0 0,17 0 0,-8-23 0,-10 17 0,19-29 0,-34 32 0,34-33 0,-19 31 0,10-19 0,8 0 0,-29 19 0,41-31 0,-41 33 0,29-8 0,-32-13 0,9 18 0,11-29 0,-17 32 0,18-9 0,-12-11 0,-9 17 0,8-29 0,-11 32 0,0-33 0,0 30 0,0-41 0,0 42 0,24-31 0,-18 10 0,17 8 0,-23-17 0,0 8 0,0 10 0,0-18 0,0 32 0,0-33 0,0 30 0,0-41 0,0 42 0,0-31 0,0 33 0,0-8 0,0-13 0,0 18 0,0-29 0,0 32 0,0-32 0,0 29 0,0-18 0,0 12 0,0 10 0,0-10 0,0 12 0,0-24 0,0 18 0,0-17 0,0 23 0</inkml:trace>
-</inkml:ink>
-</file>
-
-<file path=ppt/ink/ink5.xml><?xml version="1.0" encoding="utf-8"?>
-<inkml:ink xmlns:inkml="http://www.w3.org/2003/InkML">
-  <inkml:definitions>
-    <inkml:context xml:id="ctx0">
-      <inkml:inkSource xml:id="inkSrc0">
-        <inkml:traceFormat>
-          <inkml:channel name="X" type="integer" min="-2.14748E9" max="2.14748E9" units="cm"/>
-          <inkml:channel name="Y" type="integer" min="-2.14748E9" max="2.14748E9" units="cm"/>
-          <inkml:channel name="F" type="integer" max="32767" units="dev"/>
-        </inkml:traceFormat>
-        <inkml:channelProperties>
-          <inkml:channelProperty channel="X" name="resolution" value="1000" units="1/cm"/>
-          <inkml:channelProperty channel="Y" name="resolution" value="1000" units="1/cm"/>
-          <inkml:channelProperty channel="F" name="resolution" value="0" units="1/dev"/>
-        </inkml:channelProperties>
-      </inkml:inkSource>
       <inkml:timestamp xml:id="ts0" timeString="2025-10-21T01:05:09.122"/>
     </inkml:context>
     <inkml:brush xml:id="br0">
@@ -359,7 +325,7 @@
           </a:lstStyle>
           <a:p>
             <a:fld id="{77F5E20D-330D-AE4A-A6A6-1850AD2ED2D6}" type="datetimeFigureOut">
-              <a:t>28/1/26</a:t>
+              <a:t>31/3/26</a:t>
             </a:fld>
             <a:endParaRPr lang="en-VN"/>
           </a:p>
@@ -774,7 +740,7 @@
           <a:lstStyle/>
           <a:p>
             <a:fld id="{B19CC23C-BA29-DE42-B018-0A671B23AB5C}" type="datetime1">
-              <a:t>28/1/26</a:t>
+              <a:t>31/3/26</a:t>
             </a:fld>
             <a:endParaRPr lang="en-VN"/>
           </a:p>
@@ -972,7 +938,7 @@
           <a:lstStyle/>
           <a:p>
             <a:fld id="{4C98E9E1-1963-2549-A392-0CE442C818D3}" type="datetime1">
-              <a:t>28/1/26</a:t>
+              <a:t>31/3/26</a:t>
             </a:fld>
             <a:endParaRPr lang="en-VN"/>
           </a:p>
@@ -1180,7 +1146,7 @@
           <a:lstStyle/>
           <a:p>
             <a:fld id="{C7AFA920-85BE-4747-816A-47AD76A510FA}" type="datetime1">
-              <a:t>28/1/26</a:t>
+              <a:t>31/3/26</a:t>
             </a:fld>
             <a:endParaRPr lang="en-VN"/>
           </a:p>
@@ -1378,7 +1344,7 @@
           <a:lstStyle/>
           <a:p>
             <a:fld id="{AAD3D96D-7531-BC47-A011-B5D6B3D43310}" type="datetime1">
-              <a:t>28/1/26</a:t>
+              <a:t>31/3/26</a:t>
             </a:fld>
             <a:endParaRPr lang="en-VN"/>
           </a:p>
@@ -1688,7 +1654,7 @@
           <a:lstStyle/>
           <a:p>
             <a:fld id="{9099FF25-CCF5-1749-B789-DEA9DF3915D1}" type="datetime1">
-              <a:t>28/1/26</a:t>
+              <a:t>31/3/26</a:t>
             </a:fld>
             <a:endParaRPr lang="en-VN"/>
           </a:p>
@@ -1954,7 +1920,7 @@
           <a:lstStyle/>
           <a:p>
             <a:fld id="{96C9BD3F-C60C-8F40-A1AA-746E79F526C8}" type="datetime1">
-              <a:t>28/1/26</a:t>
+              <a:t>31/3/26</a:t>
             </a:fld>
             <a:endParaRPr lang="en-VN"/>
           </a:p>
@@ -2367,7 +2333,7 @@
           <a:lstStyle/>
           <a:p>
             <a:fld id="{A8563D55-6338-8241-BEA3-C8267015B326}" type="datetime1">
-              <a:t>28/1/26</a:t>
+              <a:t>31/3/26</a:t>
             </a:fld>
             <a:endParaRPr lang="en-VN"/>
           </a:p>
@@ -2507,7 +2473,7 @@
           <a:lstStyle/>
           <a:p>
             <a:fld id="{89782EF4-4D34-8E49-9BB8-7FCD8F64F56C}" type="datetime1">
-              <a:t>28/1/26</a:t>
+              <a:t>31/3/26</a:t>
             </a:fld>
             <a:endParaRPr lang="en-VN"/>
           </a:p>
@@ -2618,7 +2584,7 @@
           <a:lstStyle/>
           <a:p>
             <a:fld id="{8A835D4F-1253-B847-8798-F89DBC53ECA3}" type="datetime1">
-              <a:t>28/1/26</a:t>
+              <a:t>31/3/26</a:t>
             </a:fld>
             <a:endParaRPr lang="en-VN"/>
           </a:p>
@@ -2929,7 +2895,7 @@
           <a:lstStyle/>
           <a:p>
             <a:fld id="{7B60E56D-C72A-354F-B0FC-65EC27F745C6}" type="datetime1">
-              <a:t>28/1/26</a:t>
+              <a:t>31/3/26</a:t>
             </a:fld>
             <a:endParaRPr lang="en-VN"/>
           </a:p>
@@ -3216,7 +3182,7 @@
           <a:lstStyle/>
           <a:p>
             <a:fld id="{D4EEE616-05B3-E949-A580-BAD4E917BCA4}" type="datetime1">
-              <a:t>28/1/26</a:t>
+              <a:t>31/3/26</a:t>
             </a:fld>
             <a:endParaRPr lang="en-VN"/>
           </a:p>
@@ -3457,7 +3423,7 @@
           </a:lstStyle>
           <a:p>
             <a:fld id="{D2508FC7-06EA-184C-B437-1FD4117B159D}" type="datetime1">
-              <a:t>28/1/26</a:t>
+              <a:t>31/3/26</a:t>
             </a:fld>
             <a:endParaRPr lang="en-VN"/>
           </a:p>
@@ -24484,57 +24450,6 @@
           </a:p>
         </p:txBody>
       </p:sp>
-      <mc:AlternateContent xmlns:mc="http://schemas.openxmlformats.org/markup-compatibility/2006" xmlns:p14="http://schemas.microsoft.com/office/powerpoint/2010/main">
-        <mc:Choice Requires="p14">
-          <p:contentPart p14:bwMode="auto" r:id="rId9">
-            <p14:nvContentPartPr>
-              <p14:cNvPr id="3" name="Ink 2">
-                <a:extLst>
-                  <a:ext uri="{FF2B5EF4-FFF2-40B4-BE49-F238E27FC236}">
-                    <a16:creationId xmlns:a16="http://schemas.microsoft.com/office/drawing/2014/main" id="{E28D8C10-4FB6-31CF-25AD-0DD9E0741CB6}"/>
-                  </a:ext>
-                </a:extLst>
-              </p14:cNvPr>
-              <p14:cNvContentPartPr/>
-              <p14:nvPr/>
-            </p14:nvContentPartPr>
-            <p14:xfrm>
-              <a:off x="3627720" y="1895040"/>
-              <a:ext cx="6326280" cy="3486960"/>
-            </p14:xfrm>
-          </p:contentPart>
-        </mc:Choice>
-        <mc:Fallback xmlns="">
-          <p:pic>
-            <p:nvPicPr>
-              <p:cNvPr id="3" name="Ink 2">
-                <a:extLst>
-                  <a:ext uri="{FF2B5EF4-FFF2-40B4-BE49-F238E27FC236}">
-                    <a16:creationId xmlns:a16="http://schemas.microsoft.com/office/drawing/2014/main" id="{E28D8C10-4FB6-31CF-25AD-0DD9E0741CB6}"/>
-                  </a:ext>
-                </a:extLst>
-              </p:cNvPr>
-              <p:cNvPicPr/>
-              <p:nvPr/>
-            </p:nvPicPr>
-            <p:blipFill>
-              <a:blip r:embed="rId10"/>
-              <a:stretch>
-                <a:fillRect/>
-              </a:stretch>
-            </p:blipFill>
-            <p:spPr>
-              <a:xfrm>
-                <a:off x="3618360" y="1885680"/>
-                <a:ext cx="6345000" cy="3505680"/>
-              </a:xfrm>
-              <a:prstGeom prst="rect">
-                <a:avLst/>
-              </a:prstGeom>
-            </p:spPr>
-          </p:pic>
-        </mc:Fallback>
-      </mc:AlternateContent>
     </p:spTree>
     <p:extLst>
       <p:ext uri="{BB962C8B-B14F-4D97-AF65-F5344CB8AC3E}">
